--- a/presentations/on_degerlendirme_sunumu.pptx
+++ b/presentations/on_degerlendirme_sunumu.pptx
@@ -1283,7 +1283,7 @@
           <a:lstStyle/>
           <a:p>
             <a:r>
-              <a:t>Dürüstlük burada güç: "İlk held-out set hata analizi sonrası saflığını yitirdi, bu yüzden üçüncü bir evrende yepyeni bir set yazıp TEK SEFER ölçtük ve sayıları olduğu gibi koyduk." Jüri sorusu gelirse iki yönlendirme hatası: karla mücadele duyurusu İK'ya, rektörlük oluru genel müdürlüğe gitti — ikisi de düşük güven kapısına takılıp insan onayına düşecek türden sınır vakaları.</a:t>
+              <a:t>Dürüstlük burada güç: "v1 ve v2'de hata analizi sonrası İLKESEL düzeltmeler yaptık, ama bu setlerin saflığını zayıflattığı için dördüncü bir kurgu evrende (Puslupınar/Kavakdüzü) ZORLAYICI/adversarial yepyeni bir set yazıp TEK SEFER ölçtük ve sayıları olduğu gibi koyduk — bozuk sayı bloğu, kopuk İlgi zinciri, sözel tarih ve KVKK-yoğun içeriğe rağmen yönlendirme 16/16." Jüri v3 eksik-bilgi F1'ini (0,667) sorarsa: bu tam da adversarial tuzakların (gövdede olmayan İlgi'ye atıf, tamamen sözel tarih) hedefidir ve DÜZELTME YAPMADAN raporlanmıştır — sınır davranışı gizlenmedi.</a:t>
             </a:r>
           </a:p>
         </p:txBody>
@@ -5074,7 +5074,7 @@
               </a:defRPr>
             </a:pPr>
             <a:r>
-              <a:t>• Finale kadar: opsiyonel semantik arama (ChromaDB + çok dilli embedding) ile mevzuat RAG derinleştirme</a:t>
+              <a:t>• Finale kadar: opsiyonel hibrit semantik katmanın (turkish-e5-large + bge-reranker-v2-m3; hâlihazırda kurulu, varsayılan kapalı) GPU'lu makinede kalibrasyonu ve varsayılan açılması</a:t>
             </a:r>
           </a:p>
           <a:p>
@@ -5090,7 +5090,7 @@
               </a:defRPr>
             </a:pPr>
             <a:r>
-              <a:t>• Finale kadar: kullanıcı testleri ve v2 üzerinde dürüst sürekli ölçüm</a:t>
+              <a:t>• Finale kadar: kullanıcı testleri ve yeni/dokunulmamış tutulmuş setler üzerinde dürüst sürekli ölçüm</a:t>
             </a:r>
           </a:p>
           <a:p>
@@ -6746,7 +6746,7 @@
               </a:defRPr>
             </a:pPr>
             <a:r>
-              <a:t>• 67 etiketli sentetik evrak (35 geliştirme + 16 tutulmuş + 16 yeni tutulmuş v2) + 15 belgelik mevzuat korpusu</a:t>
+              <a:t>• 100 etiketli sentetik evrak (52 geliştirme + 16 tutulmuş v1 + 16 tutulmuş v2 + 16 adversarial v3) + 15 belgelik mevzuat korpusu</a:t>
             </a:r>
           </a:p>
           <a:p>
@@ -6890,15 +6890,15 @@
               <a:spcAft>
                 <a:spcPts val="500"/>
               </a:spcAft>
-              <a:defRPr sz="1800">
-                <a:solidFill>
-                  <a:srgbClr val="212121"/>
-                </a:solidFill>
-                <a:latin typeface="Calibri"/>
-              </a:defRPr>
-            </a:pPr>
-            <a:r>
-              <a:t>• Geliştirme seti (35 evrak): sınıflandırma 1,000 - yönlendirme 1,000 - eksik bilgi F1 1,000</a:t>
+              <a:defRPr sz="1600">
+                <a:solidFill>
+                  <a:srgbClr val="212121"/>
+                </a:solidFill>
+                <a:latin typeface="Calibri"/>
+              </a:defRPr>
+            </a:pPr>
+            <a:r>
+              <a:t>• Geliştirme seti (52 evrak): sınıflandırma 1,000 - yönlendirme 0,962 - eksik bilgi F1 1,000 - mevzuat isabet@3 0,962</a:t>
             </a:r>
           </a:p>
           <a:p>
@@ -6906,15 +6906,15 @@
               <a:spcAft>
                 <a:spcPts val="500"/>
               </a:spcAft>
-              <a:defRPr sz="1800">
-                <a:solidFill>
-                  <a:srgbClr val="212121"/>
-                </a:solidFill>
-                <a:latin typeface="Calibri"/>
-              </a:defRPr>
-            </a:pPr>
-            <a:r>
-              <a:t>• Tutulmuş set (16 evrak): sınıflandırma 1,000 - yönlendirme 1,000 - eksik bilgi F1 1,000</a:t>
+              <a:defRPr sz="1600">
+                <a:solidFill>
+                  <a:srgbClr val="212121"/>
+                </a:solidFill>
+                <a:latin typeface="Calibri"/>
+              </a:defRPr>
+            </a:pPr>
+            <a:r>
+              <a:t>• Tutulmuş set v1 (16 evrak): sınıflandırma 1,000 - yönlendirme 1,000 - eksik bilgi F1 1,000</a:t>
             </a:r>
           </a:p>
           <a:p>
@@ -6922,15 +6922,15 @@
               <a:spcAft>
                 <a:spcPts val="500"/>
               </a:spcAft>
-              <a:defRPr sz="1800">
-                <a:solidFill>
-                  <a:srgbClr val="212121"/>
-                </a:solidFill>
-                <a:latin typeface="Calibri"/>
-              </a:defRPr>
-            </a:pPr>
-            <a:r>
-              <a:t>• Yeni tutulmuş set v2 (16 evrak, hiç dokunulmamış, tek sefer ölçüldü):</a:t>
+              <a:defRPr sz="1600">
+                <a:solidFill>
+                  <a:srgbClr val="212121"/>
+                </a:solidFill>
+                <a:latin typeface="Calibri"/>
+              </a:defRPr>
+            </a:pPr>
+            <a:r>
+              <a:t>• Tutulmuş set v2 (16 evrak): sınıflandırma 1,000 - yönlendirme 0,938 - eksik bilgi F1 1,000</a:t>
             </a:r>
           </a:p>
           <a:p>
@@ -6938,6 +6938,22 @@
               <a:spcAft>
                 <a:spcPts val="500"/>
               </a:spcAft>
+              <a:defRPr sz="1400">
+                <a:solidFill>
+                  <a:srgbClr val="212121"/>
+                </a:solidFill>
+                <a:latin typeface="Calibri"/>
+              </a:defRPr>
+            </a:pPr>
+            <a:r>
+              <a:t>– İlk ölçümü 1,000 / 0,875 / 0,857 idi; hata analizinde bulunan İKİ kök neden</a:t>
+            </a:r>
+          </a:p>
+          <a:p>
+            <a:pPr>
+              <a:spcAft>
+                <a:spcPts val="500"/>
+              </a:spcAft>
               <a:defRPr sz="1600">
                 <a:solidFill>
                   <a:srgbClr val="212121"/>
@@ -6946,11 +6962,11 @@
               </a:defRPr>
             </a:pPr>
             <a:r>
-              <a:t>– Sınıflandırma doğruluğu: 1,000 (16/16)</a:t>
-            </a:r>
-          </a:p>
-          <a:p>
-            <a:pPr lvl="1">
+              <a:t>• (Türkçe ünsüz yumuşaması + belge "Sayı"sı ↔ İlgi atıf no ayrımı) DOSYAYA ÖZGÜ</a:t>
+            </a:r>
+          </a:p>
+          <a:p>
+            <a:pPr>
               <a:spcAft>
                 <a:spcPts val="500"/>
               </a:spcAft>
@@ -6962,11 +6978,11 @@
               </a:defRPr>
             </a:pPr>
             <a:r>
-              <a:t>– Birim yönlendirme doğruluğu: 0,875 (14/16)</a:t>
-            </a:r>
-          </a:p>
-          <a:p>
-            <a:pPr lvl="1">
+              <a:t>• ezber olmadan İLKESEL düzeltilip yeniden ölçüldü. Bu düzeltme v2'nin saflığını</a:t>
+            </a:r>
+          </a:p>
+          <a:p>
+            <a:pPr>
               <a:spcAft>
                 <a:spcPts val="500"/>
               </a:spcAft>
@@ -6978,7 +6994,7 @@
               </a:defRPr>
             </a:pPr>
             <a:r>
-              <a:t>– Eksik bilgi tespiti micro-F1: 0,857</a:t>
+              <a:t>• zayıflattığı için, ↓ tamamen dokunulmamış v3 oluşturuldu.</a:t>
             </a:r>
           </a:p>
           <a:p>
@@ -6986,15 +7002,15 @@
               <a:spcAft>
                 <a:spcPts val="500"/>
               </a:spcAft>
-              <a:defRPr sz="1800">
-                <a:solidFill>
-                  <a:srgbClr val="212121"/>
-                </a:solidFill>
-                <a:latin typeface="Calibri"/>
-              </a:defRPr>
-            </a:pPr>
-            <a:r>
-              <a:t>• Evrak başına medyan işleme süresi ~0,02 sn — gerçek zamana yakın</a:t>
+              <a:defRPr sz="1600">
+                <a:solidFill>
+                  <a:srgbClr val="212121"/>
+                </a:solidFill>
+                <a:latin typeface="Calibri"/>
+              </a:defRPr>
+            </a:pPr>
+            <a:r>
+              <a:t>• **Adversarial set v3 (16 evrak, HİÇ DOKUNULMAMIŞ, TEK SEFER ölçüldü):**</a:t>
             </a:r>
           </a:p>
           <a:p>
@@ -7002,15 +7018,47 @@
               <a:spcAft>
                 <a:spcPts val="500"/>
               </a:spcAft>
-              <a:defRPr sz="1800">
-                <a:solidFill>
-                  <a:srgbClr val="212121"/>
-                </a:solidFill>
-                <a:latin typeface="Calibri"/>
-              </a:defRPr>
-            </a:pPr>
-            <a:r>
-              <a:t>• Şeffaflık: geliştirme seti üst sınırı gösterir; v2 sonuçları hiçbir düzeltme yapılmadan olduğu gibi raporlanmıştır</a:t>
+              <a:defRPr sz="1600">
+                <a:solidFill>
+                  <a:srgbClr val="212121"/>
+                </a:solidFill>
+                <a:latin typeface="Calibri"/>
+              </a:defRPr>
+            </a:pPr>
+            <a:r>
+              <a:t>• sınıflandırma 0,938 - **yönlendirme 1,000** - eksik bilgi F1 0,667 - mevzuat isabet@3 0,875 - taslak kalitesi 95,8</a:t>
+            </a:r>
+          </a:p>
+          <a:p>
+            <a:pPr>
+              <a:spcAft>
+                <a:spcPts val="500"/>
+              </a:spcAft>
+              <a:defRPr sz="1600">
+                <a:solidFill>
+                  <a:srgbClr val="212121"/>
+                </a:solidFill>
+                <a:latin typeface="Calibri"/>
+              </a:defRPr>
+            </a:pPr>
+            <a:r>
+              <a:t>• Evrak başına medyan işleme süresi ~0,02-0,03 sn — gerçek zamana yakın</a:t>
+            </a:r>
+          </a:p>
+          <a:p>
+            <a:pPr>
+              <a:spcAft>
+                <a:spcPts val="500"/>
+              </a:spcAft>
+              <a:defRPr sz="1600">
+                <a:solidFill>
+                  <a:srgbClr val="212121"/>
+                </a:solidFill>
+                <a:latin typeface="Calibri"/>
+              </a:defRPr>
+            </a:pPr>
+            <a:r>
+              <a:t>• Şeffaflık: geliştirme seti üst sınırı gösterir; v3 sonuçları hiçbir düzeltme yapılmadan olduğu gibi raporlanmıştır</a:t>
             </a:r>
           </a:p>
         </p:txBody>

--- a/presentations/on_degerlendirme_sunumu.pptx
+++ b/presentations/on_degerlendirme_sunumu.pptx
@@ -5963,7 +5963,7 @@
               </a:defRPr>
             </a:pPr>
             <a:r>
-              <a:t>Teknik Mimari: 9 Uzman Ajan + Orkestratör</a:t>
+              <a:t>Teknik Mimari: 11 Uzman Ajan + Orkestratör</a:t>
             </a:r>
           </a:p>
         </p:txBody>
@@ -6002,7 +6002,7 @@
               </a:defRPr>
             </a:pPr>
             <a:r>
-              <a:t>• Her ajan tek sorumluluk üstlenir: OCR, Sınıflandırma, Bilgi Çıkarımı, Eksik Bilgi, Mevzuat (RAG), Özet, Taslak Yazımı, Yönlendirme, Bilgilendirme</a:t>
+              <a:t>• Her ajan tek sorumluluk üstlenir: OCR, Sınıflandırma, Bilgi Çıkarımı, Eksik Bilgi, Mevzuat (RAG), Önceliklendirme/Triyaj (aciliyet + yasal süre), Özet, KVKK Anonimleştirme (PII maskeleme), Taslak Yazımı, Yönlendirme, Bilgilendirme</a:t>
             </a:r>
           </a:p>
           <a:p>
@@ -6698,7 +6698,7 @@
               </a:defRPr>
             </a:pPr>
             <a:r>
-              <a:t>• 37 birim ve entegrasyon testi sürekli yeşil (pytest)</a:t>
+              <a:t>• 489 birim ve entegrasyon testi sürekli yeşil (`pytest tests/`, 13.07.2026)</a:t>
             </a:r>
           </a:p>
           <a:p>
@@ -7042,7 +7042,7 @@
               </a:defRPr>
             </a:pPr>
             <a:r>
-              <a:t>• Evrak başına medyan işleme süresi ~0,02-0,03 sn — gerçek zamana yakın</a:t>
+              <a:t>• Evrak başına medyan işleme süresi ~0,011-0,012 sn (kaynak: `eval_report*.json`) — gerçek zamana yakın</a:t>
             </a:r>
           </a:p>
           <a:p>

--- a/presentations/on_degerlendirme_sunumu.pptx
+++ b/presentations/on_degerlendirme_sunumu.pptx
@@ -6698,7 +6698,7 @@
               </a:defRPr>
             </a:pPr>
             <a:r>
-              <a:t>• 489 birim ve entegrasyon testi sürekli yeşil (`pytest tests/`, 13.07.2026)</a:t>
+              <a:t>• 632 birim ve entegrasyon testi sürekli yeşil (`pytest tests/`, 16.07.2026)</a:t>
             </a:r>
           </a:p>
           <a:p>
